--- a/figures/results_pbi2/pbi2.pptx
+++ b/figures/results_pbi2/pbi2.pptx
@@ -115,7 +115,7 @@
 <file path=ppt/revisionInfo.xml><?xml version="1.0" encoding="utf-8"?>
 <p1510:revInfo xmlns:a="http://schemas.openxmlformats.org/drawingml/2006/main" xmlns:r="http://schemas.openxmlformats.org/officeDocument/2006/relationships" xmlns:p1510="http://schemas.microsoft.com/office/powerpoint/2015/10/main">
   <p1510:revLst>
-    <p1510:client id="{EEF0E984-67FD-4A3D-B43B-9778945FA7E9}" v="45" dt="2026-05-15T17:20:58.126"/>
+    <p1510:client id="{EEF0E984-67FD-4A3D-B43B-9778945FA7E9}" v="62" dt="2026-05-22T14:47:45.628"/>
   </p1510:revLst>
 </p1510:revInfo>
 </file>
@@ -125,12 +125,12 @@
   <pc:docChgLst>
     <pc:chgData name="David Beckwitt" userId="bdca50846bee3b35" providerId="LiveId" clId="{77C57F99-3B40-463A-9855-34DA2A8048A2}"/>
     <pc:docChg chg="undo custSel addSld modSld">
-      <pc:chgData name="David Beckwitt" userId="bdca50846bee3b35" providerId="LiveId" clId="{77C57F99-3B40-463A-9855-34DA2A8048A2}" dt="2026-05-15T17:21:09.742" v="315" actId="20577"/>
+      <pc:chgData name="David Beckwitt" userId="bdca50846bee3b35" providerId="LiveId" clId="{77C57F99-3B40-463A-9855-34DA2A8048A2}" dt="2026-05-22T16:14:01.227" v="367" actId="478"/>
       <pc:docMkLst>
         <pc:docMk/>
       </pc:docMkLst>
       <pc:sldChg chg="addSp delSp modSp new mod">
-        <pc:chgData name="David Beckwitt" userId="bdca50846bee3b35" providerId="LiveId" clId="{77C57F99-3B40-463A-9855-34DA2A8048A2}" dt="2026-05-15T17:21:09.742" v="315" actId="20577"/>
+        <pc:chgData name="David Beckwitt" userId="bdca50846bee3b35" providerId="LiveId" clId="{77C57F99-3B40-463A-9855-34DA2A8048A2}" dt="2026-05-22T16:14:01.227" v="367" actId="478"/>
         <pc:sldMkLst>
           <pc:docMk/>
           <pc:sldMk cId="158718644" sldId="256"/>
@@ -143,28 +143,12 @@
             <ac:spMk id="2" creationId="{8F9E615C-4055-8289-EA83-8BB97F9A5FC9}"/>
           </ac:spMkLst>
         </pc:spChg>
-        <pc:spChg chg="del">
-          <ac:chgData name="David Beckwitt" userId="bdca50846bee3b35" providerId="LiveId" clId="{77C57F99-3B40-463A-9855-34DA2A8048A2}" dt="2026-05-15T17:07:28.911" v="1" actId="478"/>
-          <ac:spMkLst>
-            <pc:docMk/>
-            <pc:sldMk cId="158718644" sldId="256"/>
-            <ac:spMk id="2" creationId="{D0ADC96B-B5E7-0F7E-AF2B-2207394399CD}"/>
-          </ac:spMkLst>
-        </pc:spChg>
-        <pc:spChg chg="add mod">
-          <ac:chgData name="David Beckwitt" userId="bdca50846bee3b35" providerId="LiveId" clId="{77C57F99-3B40-463A-9855-34DA2A8048A2}" dt="2026-05-15T17:21:07.436" v="313" actId="14100"/>
+        <pc:spChg chg="add del mod ord">
+          <ac:chgData name="David Beckwitt" userId="bdca50846bee3b35" providerId="LiveId" clId="{77C57F99-3B40-463A-9855-34DA2A8048A2}" dt="2026-05-22T14:47:43.939" v="350" actId="478"/>
           <ac:spMkLst>
             <pc:docMk/>
             <pc:sldMk cId="158718644" sldId="256"/>
             <ac:spMk id="3" creationId="{D952BE5D-CF64-ED39-BACB-D5BC3D5ED94D}"/>
-          </ac:spMkLst>
-        </pc:spChg>
-        <pc:spChg chg="del">
-          <ac:chgData name="David Beckwitt" userId="bdca50846bee3b35" providerId="LiveId" clId="{77C57F99-3B40-463A-9855-34DA2A8048A2}" dt="2026-05-15T17:07:28.911" v="1" actId="478"/>
-          <ac:spMkLst>
-            <pc:docMk/>
-            <pc:sldMk cId="158718644" sldId="256"/>
-            <ac:spMk id="3" creationId="{EB29671A-3D09-10BA-C6A5-EA45304FD1C9}"/>
           </ac:spMkLst>
         </pc:spChg>
         <pc:spChg chg="add mod">
@@ -183,28 +167,12 @@
             <ac:spMk id="5" creationId="{2E2F986E-3F66-A838-5F1A-F40EC011F910}"/>
           </ac:spMkLst>
         </pc:spChg>
-        <pc:spChg chg="add del mod ord topLvl">
-          <ac:chgData name="David Beckwitt" userId="bdca50846bee3b35" providerId="LiveId" clId="{77C57F99-3B40-463A-9855-34DA2A8048A2}" dt="2026-05-15T17:11:37.972" v="69" actId="478"/>
+        <pc:spChg chg="add mod ord">
+          <ac:chgData name="David Beckwitt" userId="bdca50846bee3b35" providerId="LiveId" clId="{77C57F99-3B40-463A-9855-34DA2A8048A2}" dt="2026-05-22T14:48:25.657" v="363" actId="171"/>
           <ac:spMkLst>
             <pc:docMk/>
             <pc:sldMk cId="158718644" sldId="256"/>
-            <ac:spMk id="10" creationId="{53573469-19E2-1152-1BF2-83B1DD1FF021}"/>
-          </ac:spMkLst>
-        </pc:spChg>
-        <pc:spChg chg="add del mod">
-          <ac:chgData name="David Beckwitt" userId="bdca50846bee3b35" providerId="LiveId" clId="{77C57F99-3B40-463A-9855-34DA2A8048A2}" dt="2026-05-15T17:10:50.102" v="47" actId="478"/>
-          <ac:spMkLst>
-            <pc:docMk/>
-            <pc:sldMk cId="158718644" sldId="256"/>
-            <ac:spMk id="14" creationId="{F6D43036-E179-7146-B297-387358EB328B}"/>
-          </ac:spMkLst>
-        </pc:spChg>
-        <pc:spChg chg="add mod">
-          <ac:chgData name="David Beckwitt" userId="bdca50846bee3b35" providerId="LiveId" clId="{77C57F99-3B40-463A-9855-34DA2A8048A2}" dt="2026-05-15T17:10:50.371" v="48"/>
-          <ac:spMkLst>
-            <pc:docMk/>
-            <pc:sldMk cId="158718644" sldId="256"/>
-            <ac:spMk id="16" creationId="{51495C13-F4E6-28B6-BDBD-607F1BB16874}"/>
+            <ac:spMk id="8" creationId="{A404AC99-EC48-5052-783A-E5486DA48F02}"/>
           </ac:spMkLst>
         </pc:spChg>
         <pc:spChg chg="add mod ord">
@@ -232,51 +200,27 @@
           </ac:spMkLst>
         </pc:spChg>
         <pc:spChg chg="add mod">
-          <ac:chgData name="David Beckwitt" userId="bdca50846bee3b35" providerId="LiveId" clId="{77C57F99-3B40-463A-9855-34DA2A8048A2}" dt="2026-05-15T17:15:25.503" v="205" actId="207"/>
+          <ac:chgData name="David Beckwitt" userId="bdca50846bee3b35" providerId="LiveId" clId="{77C57F99-3B40-463A-9855-34DA2A8048A2}" dt="2026-05-22T14:48:17.169" v="362" actId="1076"/>
           <ac:spMkLst>
             <pc:docMk/>
             <pc:sldMk cId="158718644" sldId="256"/>
             <ac:spMk id="43" creationId="{ABDE7C0C-0A74-7CD8-CE1E-CAEBB616A528}"/>
           </ac:spMkLst>
         </pc:spChg>
-        <pc:grpChg chg="add del mod ord">
-          <ac:chgData name="David Beckwitt" userId="bdca50846bee3b35" providerId="LiveId" clId="{77C57F99-3B40-463A-9855-34DA2A8048A2}" dt="2026-05-15T17:11:33.769" v="67" actId="165"/>
-          <ac:grpSpMkLst>
-            <pc:docMk/>
-            <pc:sldMk cId="158718644" sldId="256"/>
-            <ac:grpSpMk id="11" creationId="{5B8E0A3E-83AD-C0EF-4440-2C9BF3D77F76}"/>
-          </ac:grpSpMkLst>
-        </pc:grpChg>
         <pc:picChg chg="add del mod">
-          <ac:chgData name="David Beckwitt" userId="bdca50846bee3b35" providerId="LiveId" clId="{77C57F99-3B40-463A-9855-34DA2A8048A2}" dt="2026-05-15T17:10:50.102" v="47" actId="478"/>
+          <ac:chgData name="David Beckwitt" userId="bdca50846bee3b35" providerId="LiveId" clId="{77C57F99-3B40-463A-9855-34DA2A8048A2}" dt="2026-05-22T16:14:01.227" v="367" actId="478"/>
           <ac:picMkLst>
             <pc:docMk/>
             <pc:sldMk cId="158718644" sldId="256"/>
-            <ac:picMk id="5" creationId="{FF245258-9F14-35D7-09B1-CE3579A202CD}"/>
-          </ac:picMkLst>
-        </pc:picChg>
-        <pc:picChg chg="add del mod">
-          <ac:chgData name="David Beckwitt" userId="bdca50846bee3b35" providerId="LiveId" clId="{77C57F99-3B40-463A-9855-34DA2A8048A2}" dt="2026-05-15T17:07:53.017" v="17" actId="478"/>
-          <ac:picMkLst>
-            <pc:docMk/>
-            <pc:sldMk cId="158718644" sldId="256"/>
-            <ac:picMk id="7" creationId="{3EAE1246-8120-26EB-8E27-2A30C678348D}"/>
+            <ac:picMk id="6" creationId="{D228A222-9C11-ECB3-29CC-E6891EDF7B76}"/>
           </ac:picMkLst>
         </pc:picChg>
         <pc:picChg chg="add mod topLvl">
-          <ac:chgData name="David Beckwitt" userId="bdca50846bee3b35" providerId="LiveId" clId="{77C57F99-3B40-463A-9855-34DA2A8048A2}" dt="2026-05-15T17:13:02.589" v="90" actId="1076"/>
+          <ac:chgData name="David Beckwitt" userId="bdca50846bee3b35" providerId="LiveId" clId="{77C57F99-3B40-463A-9855-34DA2A8048A2}" dt="2026-05-22T14:48:14.526" v="361" actId="1076"/>
           <ac:picMkLst>
             <pc:docMk/>
             <pc:sldMk cId="158718644" sldId="256"/>
             <ac:picMk id="9" creationId="{1E8B0CFE-96B2-3011-B9D1-68693970533A}"/>
-          </ac:picMkLst>
-        </pc:picChg>
-        <pc:picChg chg="add mod">
-          <ac:chgData name="David Beckwitt" userId="bdca50846bee3b35" providerId="LiveId" clId="{77C57F99-3B40-463A-9855-34DA2A8048A2}" dt="2026-05-15T17:10:50.371" v="48"/>
-          <ac:picMkLst>
-            <pc:docMk/>
-            <pc:sldMk cId="158718644" sldId="256"/>
-            <ac:picMk id="15" creationId="{A0B5BA39-78E7-7F0C-F7E3-CFF5F515A432}"/>
           </ac:picMkLst>
         </pc:picChg>
         <pc:picChg chg="add mod ord modCrop">
@@ -287,16 +231,16 @@
             <ac:picMk id="18" creationId="{5660AB00-627F-FA6E-1DE7-A74C6930EED5}"/>
           </ac:picMkLst>
         </pc:picChg>
-        <pc:cxnChg chg="add del">
-          <ac:chgData name="David Beckwitt" userId="bdca50846bee3b35" providerId="LiveId" clId="{77C57F99-3B40-463A-9855-34DA2A8048A2}" dt="2026-05-15T17:10:16.075" v="36" actId="478"/>
+        <pc:cxnChg chg="add mod">
+          <ac:chgData name="David Beckwitt" userId="bdca50846bee3b35" providerId="LiveId" clId="{77C57F99-3B40-463A-9855-34DA2A8048A2}" dt="2026-05-22T14:47:58.050" v="355" actId="14100"/>
           <ac:cxnSpMkLst>
             <pc:docMk/>
             <pc:sldMk cId="158718644" sldId="256"/>
-            <ac:cxnSpMk id="13" creationId="{4DA0CD0E-9ED8-2D8F-A51E-6575EA2B6E5E}"/>
+            <ac:cxnSpMk id="7" creationId="{8321BEC1-98E0-145C-72BD-773B9E9B7980}"/>
           </ac:cxnSpMkLst>
         </pc:cxnChg>
         <pc:cxnChg chg="add mod">
-          <ac:chgData name="David Beckwitt" userId="bdca50846bee3b35" providerId="LiveId" clId="{77C57F99-3B40-463A-9855-34DA2A8048A2}" dt="2026-05-15T17:13:13.718" v="94" actId="14100"/>
+          <ac:chgData name="David Beckwitt" userId="bdca50846bee3b35" providerId="LiveId" clId="{77C57F99-3B40-463A-9855-34DA2A8048A2}" dt="2026-05-22T14:48:14.526" v="361" actId="1076"/>
           <ac:cxnSpMkLst>
             <pc:docMk/>
             <pc:sldMk cId="158718644" sldId="256"/>
@@ -311,8 +255,8 @@
             <ac:cxnSpMk id="22" creationId="{A2A5EEDF-F111-F3BF-FE68-6B7D96DA4B5E}"/>
           </ac:cxnSpMkLst>
         </pc:cxnChg>
-        <pc:cxnChg chg="add mod">
-          <ac:chgData name="David Beckwitt" userId="bdca50846bee3b35" providerId="LiveId" clId="{77C57F99-3B40-463A-9855-34DA2A8048A2}" dt="2026-05-15T17:15:21.258" v="204" actId="14100"/>
+        <pc:cxnChg chg="add del mod">
+          <ac:chgData name="David Beckwitt" userId="bdca50846bee3b35" providerId="LiveId" clId="{77C57F99-3B40-463A-9855-34DA2A8048A2}" dt="2026-05-22T14:47:45.377" v="351" actId="478"/>
           <ac:cxnSpMkLst>
             <pc:docMk/>
             <pc:sldMk cId="158718644" sldId="256"/>
@@ -472,7 +416,7 @@
           <a:p>
             <a:fld id="{D56BF303-57ED-490C-BE0F-FEFFCE9B03EC}" type="datetimeFigureOut">
               <a:rPr lang="en-US" smtClean="0"/>
-              <a:t>5/15/2026</a:t>
+              <a:t>5/22/2026</a:t>
             </a:fld>
             <a:endParaRPr lang="en-US"/>
           </a:p>
@@ -670,7 +614,7 @@
           <a:p>
             <a:fld id="{D56BF303-57ED-490C-BE0F-FEFFCE9B03EC}" type="datetimeFigureOut">
               <a:rPr lang="en-US" smtClean="0"/>
-              <a:t>5/15/2026</a:t>
+              <a:t>5/22/2026</a:t>
             </a:fld>
             <a:endParaRPr lang="en-US"/>
           </a:p>
@@ -878,7 +822,7 @@
           <a:p>
             <a:fld id="{D56BF303-57ED-490C-BE0F-FEFFCE9B03EC}" type="datetimeFigureOut">
               <a:rPr lang="en-US" smtClean="0"/>
-              <a:t>5/15/2026</a:t>
+              <a:t>5/22/2026</a:t>
             </a:fld>
             <a:endParaRPr lang="en-US"/>
           </a:p>
@@ -1076,7 +1020,7 @@
           <a:p>
             <a:fld id="{D56BF303-57ED-490C-BE0F-FEFFCE9B03EC}" type="datetimeFigureOut">
               <a:rPr lang="en-US" smtClean="0"/>
-              <a:t>5/15/2026</a:t>
+              <a:t>5/22/2026</a:t>
             </a:fld>
             <a:endParaRPr lang="en-US"/>
           </a:p>
@@ -1351,7 +1295,7 @@
           <a:p>
             <a:fld id="{D56BF303-57ED-490C-BE0F-FEFFCE9B03EC}" type="datetimeFigureOut">
               <a:rPr lang="en-US" smtClean="0"/>
-              <a:t>5/15/2026</a:t>
+              <a:t>5/22/2026</a:t>
             </a:fld>
             <a:endParaRPr lang="en-US"/>
           </a:p>
@@ -1616,7 +1560,7 @@
           <a:p>
             <a:fld id="{D56BF303-57ED-490C-BE0F-FEFFCE9B03EC}" type="datetimeFigureOut">
               <a:rPr lang="en-US" smtClean="0"/>
-              <a:t>5/15/2026</a:t>
+              <a:t>5/22/2026</a:t>
             </a:fld>
             <a:endParaRPr lang="en-US"/>
           </a:p>
@@ -2028,7 +1972,7 @@
           <a:p>
             <a:fld id="{D56BF303-57ED-490C-BE0F-FEFFCE9B03EC}" type="datetimeFigureOut">
               <a:rPr lang="en-US" smtClean="0"/>
-              <a:t>5/15/2026</a:t>
+              <a:t>5/22/2026</a:t>
             </a:fld>
             <a:endParaRPr lang="en-US"/>
           </a:p>
@@ -2169,7 +2113,7 @@
           <a:p>
             <a:fld id="{D56BF303-57ED-490C-BE0F-FEFFCE9B03EC}" type="datetimeFigureOut">
               <a:rPr lang="en-US" smtClean="0"/>
-              <a:t>5/15/2026</a:t>
+              <a:t>5/22/2026</a:t>
             </a:fld>
             <a:endParaRPr lang="en-US"/>
           </a:p>
@@ -2282,7 +2226,7 @@
           <a:p>
             <a:fld id="{D56BF303-57ED-490C-BE0F-FEFFCE9B03EC}" type="datetimeFigureOut">
               <a:rPr lang="en-US" smtClean="0"/>
-              <a:t>5/15/2026</a:t>
+              <a:t>5/22/2026</a:t>
             </a:fld>
             <a:endParaRPr lang="en-US"/>
           </a:p>
@@ -2593,7 +2537,7 @@
           <a:p>
             <a:fld id="{D56BF303-57ED-490C-BE0F-FEFFCE9B03EC}" type="datetimeFigureOut">
               <a:rPr lang="en-US" smtClean="0"/>
-              <a:t>5/15/2026</a:t>
+              <a:t>5/22/2026</a:t>
             </a:fld>
             <a:endParaRPr lang="en-US"/>
           </a:p>
@@ -2881,7 +2825,7 @@
           <a:p>
             <a:fld id="{D56BF303-57ED-490C-BE0F-FEFFCE9B03EC}" type="datetimeFigureOut">
               <a:rPr lang="en-US" smtClean="0"/>
-              <a:t>5/15/2026</a:t>
+              <a:t>5/22/2026</a:t>
             </a:fld>
             <a:endParaRPr lang="en-US"/>
           </a:p>
@@ -3122,7 +3066,7 @@
           <a:p>
             <a:fld id="{D56BF303-57ED-490C-BE0F-FEFFCE9B03EC}" type="datetimeFigureOut">
               <a:rPr lang="en-US" smtClean="0"/>
-              <a:t>5/15/2026</a:t>
+              <a:t>5/22/2026</a:t>
             </a:fld>
             <a:endParaRPr lang="en-US"/>
           </a:p>
@@ -3909,89 +3853,127 @@
           </a:p>
         </p:txBody>
       </p:sp>
-      <p:cxnSp>
-        <p:nvCxnSpPr>
-          <p:cNvPr id="42" name="Straight Arrow Connector 41">
-            <a:extLst>
-              <a:ext uri="{FF2B5EF4-FFF2-40B4-BE49-F238E27FC236}">
-                <a16:creationId xmlns:a16="http://schemas.microsoft.com/office/drawing/2014/main" id="{D8647960-945A-9EA7-C1FE-5EAE213E1240}"/>
-              </a:ext>
-            </a:extLst>
-          </p:cNvPr>
-          <p:cNvCxnSpPr>
-            <a:cxnSpLocks/>
-          </p:cNvCxnSpPr>
-          <p:nvPr/>
-        </p:nvCxnSpPr>
-        <p:spPr>
-          <a:xfrm flipH="1">
-            <a:off x="5276849" y="3956050"/>
-            <a:ext cx="1447801" cy="148084"/>
-          </a:xfrm>
-          <a:prstGeom prst="straightConnector1">
-            <a:avLst/>
-          </a:prstGeom>
-          <a:ln>
-            <a:solidFill>
-              <a:srgbClr val="FF0000"/>
-            </a:solidFill>
-            <a:tailEnd type="triangle"/>
-          </a:ln>
-        </p:spPr>
-        <p:style>
-          <a:lnRef idx="2">
-            <a:schemeClr val="accent1"/>
-          </a:lnRef>
-          <a:fillRef idx="0">
-            <a:schemeClr val="accent1"/>
-          </a:fillRef>
-          <a:effectRef idx="1">
-            <a:schemeClr val="accent1"/>
-          </a:effectRef>
-          <a:fontRef idx="minor">
-            <a:schemeClr val="tx1"/>
-          </a:fontRef>
-        </p:style>
-      </p:cxnSp>
-      <p:sp>
-        <p:nvSpPr>
-          <p:cNvPr id="43" name="TextBox 42">
-            <a:extLst>
-              <a:ext uri="{FF2B5EF4-FFF2-40B4-BE49-F238E27FC236}">
-                <a16:creationId xmlns:a16="http://schemas.microsoft.com/office/drawing/2014/main" id="{ABDE7C0C-0A74-7CD8-CE1E-CAEBB616A528}"/>
-              </a:ext>
-            </a:extLst>
-          </p:cNvPr>
-          <p:cNvSpPr txBox="1"/>
-          <p:nvPr/>
-        </p:nvSpPr>
-        <p:spPr>
-          <a:xfrm>
-            <a:off x="6303531" y="3714835"/>
-            <a:ext cx="947695" cy="253916"/>
-          </a:xfrm>
-          <a:prstGeom prst="rect">
-            <a:avLst/>
-          </a:prstGeom>
-          <a:noFill/>
-        </p:spPr>
-        <p:txBody>
-          <a:bodyPr wrap="none" rtlCol="0">
-            <a:spAutoFit/>
-          </a:bodyPr>
-          <a:lstStyle/>
-          <a:p>
-            <a:r>
-              <a:rPr lang="en-US" sz="1050" dirty="0">
-                <a:solidFill>
-                  <a:srgbClr val="FF0000"/>
-                </a:solidFill>
-              </a:rPr>
-              <a:t>Beam Center</a:t>
-            </a:r>
-          </a:p>
-        </p:txBody>
-      </p:sp>
+      <mc:AlternateContent xmlns:mc="http://schemas.openxmlformats.org/markup-compatibility/2006" xmlns:a14="http://schemas.microsoft.com/office/drawing/2010/main">
+        <mc:Choice Requires="a14">
+          <p:sp>
+            <p:nvSpPr>
+              <p:cNvPr id="43" name="TextBox 42">
+                <a:extLst>
+                  <a:ext uri="{FF2B5EF4-FFF2-40B4-BE49-F238E27FC236}">
+                    <a16:creationId xmlns:a16="http://schemas.microsoft.com/office/drawing/2014/main" id="{ABDE7C0C-0A74-7CD8-CE1E-CAEBB616A528}"/>
+                  </a:ext>
+                </a:extLst>
+              </p:cNvPr>
+              <p:cNvSpPr txBox="1"/>
+              <p:nvPr/>
+            </p:nvSpPr>
+            <p:spPr>
+              <a:xfrm rot="16200000">
+                <a:off x="3297005" y="3486700"/>
+                <a:ext cx="512320" cy="215444"/>
+              </a:xfrm>
+              <a:prstGeom prst="rect">
+                <a:avLst/>
+              </a:prstGeom>
+              <a:noFill/>
+            </p:spPr>
+            <p:txBody>
+              <a:bodyPr wrap="none" rtlCol="0">
+                <a:spAutoFit/>
+              </a:bodyPr>
+              <a:lstStyle/>
+              <a:p>
+                <a:pPr/>
+                <a14:m>
+                  <m:oMathPara xmlns:m="http://schemas.openxmlformats.org/officeDocument/2006/math">
+                    <m:oMathParaPr>
+                      <m:jc m:val="centerGroup"/>
+                    </m:oMathParaPr>
+                    <m:oMath xmlns:m="http://schemas.openxmlformats.org/officeDocument/2006/math">
+                      <m:r>
+                        <a:rPr lang="en-US" sz="800" b="0" i="1" smtClean="0">
+                          <a:solidFill>
+                            <a:srgbClr val="FF0000"/>
+                          </a:solidFill>
+                          <a:latin typeface="Cambria Math" panose="02040503050406030204" pitchFamily="18" charset="0"/>
+                        </a:rPr>
+                        <m:t>2</m:t>
+                      </m:r>
+                      <m:r>
+                        <a:rPr lang="en-US" sz="800" b="0" i="1" smtClean="0">
+                          <a:solidFill>
+                            <a:srgbClr val="FF0000"/>
+                          </a:solidFill>
+                          <a:latin typeface="Cambria Math" panose="02040503050406030204" pitchFamily="18" charset="0"/>
+                        </a:rPr>
+                        <m:t>𝜃</m:t>
+                      </m:r>
+                      <m:r>
+                        <a:rPr lang="en-US" sz="800" b="0" i="1" smtClean="0">
+                          <a:solidFill>
+                            <a:srgbClr val="FF0000"/>
+                          </a:solidFill>
+                          <a:latin typeface="Cambria Math" panose="02040503050406030204" pitchFamily="18" charset="0"/>
+                        </a:rPr>
+                        <m:t>=0</m:t>
+                      </m:r>
+                    </m:oMath>
+                  </m:oMathPara>
+                </a14:m>
+                <a:endParaRPr lang="en-US" sz="1050" dirty="0">
+                  <a:solidFill>
+                    <a:srgbClr val="FF0000"/>
+                  </a:solidFill>
+                </a:endParaRPr>
+              </a:p>
+            </p:txBody>
+          </p:sp>
+        </mc:Choice>
+        <mc:Fallback xmlns="">
+          <p:sp>
+            <p:nvSpPr>
+              <p:cNvPr id="43" name="TextBox 42">
+                <a:extLst>
+                  <a:ext uri="{FF2B5EF4-FFF2-40B4-BE49-F238E27FC236}">
+                    <a16:creationId xmlns:a16="http://schemas.microsoft.com/office/drawing/2014/main" id="{ABDE7C0C-0A74-7CD8-CE1E-CAEBB616A528}"/>
+                  </a:ext>
+                </a:extLst>
+              </p:cNvPr>
+              <p:cNvSpPr txBox="1">
+                <a:spLocks noRot="1" noChangeAspect="1" noMove="1" noResize="1" noEditPoints="1" noAdjustHandles="1" noChangeArrowheads="1" noChangeShapeType="1" noTextEdit="1"/>
+              </p:cNvSpPr>
+              <p:nvPr/>
+            </p:nvSpPr>
+            <p:spPr>
+              <a:xfrm rot="16200000">
+                <a:off x="3297005" y="3486700"/>
+                <a:ext cx="512320" cy="215444"/>
+              </a:xfrm>
+              <a:prstGeom prst="rect">
+                <a:avLst/>
+              </a:prstGeom>
+              <a:blipFill>
+                <a:blip r:embed="rId5"/>
+                <a:stretch>
+                  <a:fillRect/>
+                </a:stretch>
+              </a:blipFill>
+            </p:spPr>
+            <p:txBody>
+              <a:bodyPr/>
+              <a:lstStyle/>
+              <a:p>
+                <a:r>
+                  <a:rPr lang="en-US">
+                    <a:noFill/>
+                  </a:rPr>
+                  <a:t> </a:t>
+                </a:r>
+              </a:p>
+            </p:txBody>
+          </p:sp>
+        </mc:Fallback>
+      </mc:AlternateContent>
       <p:sp>
         <p:nvSpPr>
           <p:cNvPr id="2" name="Rectangle 1">
@@ -4050,10 +4032,88 @@
       </p:sp>
       <p:sp>
         <p:nvSpPr>
-          <p:cNvPr id="3" name="Rectangle 2">
-            <a:extLst>
-              <a:ext uri="{FF2B5EF4-FFF2-40B4-BE49-F238E27FC236}">
-                <a16:creationId xmlns:a16="http://schemas.microsoft.com/office/drawing/2014/main" id="{D952BE5D-CF64-ED39-BACB-D5BC3D5ED94D}"/>
+          <p:cNvPr id="4" name="TextBox 3">
+            <a:extLst>
+              <a:ext uri="{FF2B5EF4-FFF2-40B4-BE49-F238E27FC236}">
+                <a16:creationId xmlns:a16="http://schemas.microsoft.com/office/drawing/2014/main" id="{261DCEA3-C6C4-E96D-66F9-D06E203D4AEB}"/>
+              </a:ext>
+            </a:extLst>
+          </p:cNvPr>
+          <p:cNvSpPr txBox="1"/>
+          <p:nvPr/>
+        </p:nvSpPr>
+        <p:spPr>
+          <a:xfrm>
+            <a:off x="3041956" y="1963435"/>
+            <a:ext cx="444352" cy="253916"/>
+          </a:xfrm>
+          <a:prstGeom prst="rect">
+            <a:avLst/>
+          </a:prstGeom>
+          <a:noFill/>
+        </p:spPr>
+        <p:txBody>
+          <a:bodyPr wrap="none" rtlCol="0">
+            <a:spAutoFit/>
+          </a:bodyPr>
+          <a:lstStyle/>
+          <a:p>
+            <a:r>
+              <a:rPr lang="en-US" sz="1050" dirty="0">
+                <a:solidFill>
+                  <a:schemeClr val="bg1"/>
+                </a:solidFill>
+              </a:rPr>
+              <a:t>m=1</a:t>
+            </a:r>
+          </a:p>
+        </p:txBody>
+      </p:sp>
+      <p:sp>
+        <p:nvSpPr>
+          <p:cNvPr id="5" name="TextBox 4">
+            <a:extLst>
+              <a:ext uri="{FF2B5EF4-FFF2-40B4-BE49-F238E27FC236}">
+                <a16:creationId xmlns:a16="http://schemas.microsoft.com/office/drawing/2014/main" id="{2E2F986E-3F66-A838-5F1A-F40EC011F910}"/>
+              </a:ext>
+            </a:extLst>
+          </p:cNvPr>
+          <p:cNvSpPr txBox="1"/>
+          <p:nvPr/>
+        </p:nvSpPr>
+        <p:spPr>
+          <a:xfrm>
+            <a:off x="3721819" y="1620500"/>
+            <a:ext cx="444352" cy="253916"/>
+          </a:xfrm>
+          <a:prstGeom prst="rect">
+            <a:avLst/>
+          </a:prstGeom>
+          <a:noFill/>
+        </p:spPr>
+        <p:txBody>
+          <a:bodyPr wrap="none" rtlCol="0">
+            <a:spAutoFit/>
+          </a:bodyPr>
+          <a:lstStyle/>
+          <a:p>
+            <a:r>
+              <a:rPr lang="en-US" sz="1050" dirty="0">
+                <a:solidFill>
+                  <a:schemeClr val="bg1"/>
+                </a:solidFill>
+              </a:rPr>
+              <a:t>m=0</a:t>
+            </a:r>
+          </a:p>
+        </p:txBody>
+      </p:sp>
+      <p:sp>
+        <p:nvSpPr>
+          <p:cNvPr id="8" name="Rectangle 7">
+            <a:extLst>
+              <a:ext uri="{FF2B5EF4-FFF2-40B4-BE49-F238E27FC236}">
+                <a16:creationId xmlns:a16="http://schemas.microsoft.com/office/drawing/2014/main" id="{A404AC99-EC48-5052-783A-E5486DA48F02}"/>
               </a:ext>
             </a:extLst>
           </p:cNvPr>
@@ -4100,88 +4160,55 @@
           <a:lstStyle/>
           <a:p>
             <a:pPr algn="ctr"/>
-            <a:endParaRPr lang="en-US"/>
-          </a:p>
-        </p:txBody>
-      </p:sp>
-      <p:sp>
-        <p:nvSpPr>
-          <p:cNvPr id="4" name="TextBox 3">
-            <a:extLst>
-              <a:ext uri="{FF2B5EF4-FFF2-40B4-BE49-F238E27FC236}">
-                <a16:creationId xmlns:a16="http://schemas.microsoft.com/office/drawing/2014/main" id="{261DCEA3-C6C4-E96D-66F9-D06E203D4AEB}"/>
-              </a:ext>
-            </a:extLst>
-          </p:cNvPr>
-          <p:cNvSpPr txBox="1"/>
+            <a:endParaRPr lang="en-US" dirty="0"/>
+          </a:p>
+        </p:txBody>
+      </p:sp>
+      <p:cxnSp>
+        <p:nvCxnSpPr>
+          <p:cNvPr id="7" name="Straight Arrow Connector 6">
+            <a:extLst>
+              <a:ext uri="{FF2B5EF4-FFF2-40B4-BE49-F238E27FC236}">
+                <a16:creationId xmlns:a16="http://schemas.microsoft.com/office/drawing/2014/main" id="{8321BEC1-98E0-145C-72BD-773B9E9B7980}"/>
+              </a:ext>
+            </a:extLst>
+          </p:cNvPr>
+          <p:cNvCxnSpPr>
+            <a:cxnSpLocks/>
+            <a:endCxn id="8" idx="2"/>
+          </p:cNvCxnSpPr>
           <p:nvPr/>
-        </p:nvSpPr>
+        </p:nvCxnSpPr>
         <p:spPr>
           <a:xfrm>
-            <a:off x="3041956" y="1963435"/>
-            <a:ext cx="444352" cy="253916"/>
+            <a:off x="3626521" y="3594422"/>
+            <a:ext cx="302604" cy="236811"/>
           </a:xfrm>
-          <a:prstGeom prst="rect">
+          <a:prstGeom prst="straightConnector1">
             <a:avLst/>
           </a:prstGeom>
-          <a:noFill/>
+          <a:ln>
+            <a:solidFill>
+              <a:srgbClr val="FF0000"/>
+            </a:solidFill>
+            <a:tailEnd type="triangle"/>
+          </a:ln>
         </p:spPr>
-        <p:txBody>
-          <a:bodyPr wrap="none" rtlCol="0">
-            <a:spAutoFit/>
-          </a:bodyPr>
-          <a:lstStyle/>
-          <a:p>
-            <a:r>
-              <a:rPr lang="en-US" sz="1050" dirty="0">
-                <a:solidFill>
-                  <a:schemeClr val="bg1"/>
-                </a:solidFill>
-              </a:rPr>
-              <a:t>m=1</a:t>
-            </a:r>
-          </a:p>
-        </p:txBody>
-      </p:sp>
-      <p:sp>
-        <p:nvSpPr>
-          <p:cNvPr id="5" name="TextBox 4">
-            <a:extLst>
-              <a:ext uri="{FF2B5EF4-FFF2-40B4-BE49-F238E27FC236}">
-                <a16:creationId xmlns:a16="http://schemas.microsoft.com/office/drawing/2014/main" id="{2E2F986E-3F66-A838-5F1A-F40EC011F910}"/>
-              </a:ext>
-            </a:extLst>
-          </p:cNvPr>
-          <p:cNvSpPr txBox="1"/>
-          <p:nvPr/>
-        </p:nvSpPr>
-        <p:spPr>
-          <a:xfrm>
-            <a:off x="3721819" y="1620500"/>
-            <a:ext cx="444352" cy="253916"/>
-          </a:xfrm>
-          <a:prstGeom prst="rect">
-            <a:avLst/>
-          </a:prstGeom>
-          <a:noFill/>
-        </p:spPr>
-        <p:txBody>
-          <a:bodyPr wrap="none" rtlCol="0">
-            <a:spAutoFit/>
-          </a:bodyPr>
-          <a:lstStyle/>
-          <a:p>
-            <a:r>
-              <a:rPr lang="en-US" sz="1050" dirty="0">
-                <a:solidFill>
-                  <a:schemeClr val="bg1"/>
-                </a:solidFill>
-              </a:rPr>
-              <a:t>m=0</a:t>
-            </a:r>
-          </a:p>
-        </p:txBody>
-      </p:sp>
+        <p:style>
+          <a:lnRef idx="2">
+            <a:schemeClr val="accent1"/>
+          </a:lnRef>
+          <a:fillRef idx="0">
+            <a:schemeClr val="accent1"/>
+          </a:fillRef>
+          <a:effectRef idx="1">
+            <a:schemeClr val="accent1"/>
+          </a:effectRef>
+          <a:fontRef idx="minor">
+            <a:schemeClr val="tx1"/>
+          </a:fontRef>
+        </p:style>
+      </p:cxnSp>
     </p:spTree>
     <p:extLst>
       <p:ext uri="{BB962C8B-B14F-4D97-AF65-F5344CB8AC3E}">
